--- a/OPT_DROGURI/ro/fisiere/C01.pptx
+++ b/OPT_DROGURI/ro/fisiere/C01.pptx
@@ -1508,7 +1508,7 @@
           <a:lstStyle/>
           <a:p>
             <a:r>
-              <a:t>Aceasta este prima dintre cele patru capcane ale ședinței: prima dată în acest curs, dar nu ultima.</a:t>
+              <a:t>Primul dintre cele patru titluri pe care le citim critic în ședința de azi: prima dată în acest curs, dar nu ultima.</a:t>
             </a:r>
           </a:p>
         </p:txBody>
@@ -2110,7 +2110,7 @@
           <a:lstStyle/>
           <a:p>
             <a:r>
-              <a:t>A doua capcană. Formularea „opioidele cresc dopamina” este falsă ca regulă generală: contează subtipul de receptor. La om, un agonist kappa a produs disforie, într-un studiu din 1986.</a:t>
+              <a:t>Al doilea titlu. Formularea „opioidele cresc dopamina” este falsă ca regulă generală: contează subtipul de receptor. La om, un agonist kappa a produs disforie, într-un studiu din 1986.</a:t>
             </a:r>
           </a:p>
         </p:txBody>
@@ -2196,7 +2196,7 @@
           <a:lstStyle/>
           <a:p>
             <a:r>
-              <a:t>După al doilea tabel vă întreb ce au în comun agoniștii opioizi μ și benzodiazepinele.</a:t>
+              <a:t>După al doilea tabel vă întreb ce au în comun agoniștii opioizi μ și benzodiazepinele. Pentru fiecare clasă există și o sinteză recentă: Volkow, Michaelides și Baler, 2019.</a:t>
             </a:r>
           </a:p>
         </p:txBody>
@@ -2282,7 +2282,7 @@
           <a:lstStyle/>
           <a:p>
             <a:r>
-              <a:t>Alcoolul demontează orice model „un drog, un receptor”: dacă cineva vă spune că alcoolul acționează pe GABA, întrebați care dintre cele șapte ținte. Pentru benzodiazepine, datele sunt de la șoarece: dezinhibiția din aria tegmentală ventrală depinde de α1, iar α2 contribuie și la efectul anxiolitic, și la recompensă.</a:t>
+              <a:t>Alcoolul demontează orice model „un drog, un receptor”: dacă cineva vă spune că alcoolul acționează pe GABA, întrebați care dintre cele șapte ținte. Pentru benzodiazepine, datele sunt de la șoarece: dezinhibiția din aria tegmentală ventrală depinde de α1, dar recompensa cere și α2, posibil α3 (Engin, 2023), deci nu se separă de efectul anxiolitic pe subunități. Pentru fiecare clasă există și o sinteză recentă: Volkow, Michaelides și Baler, 2019.</a:t>
             </a:r>
           </a:p>
         </p:txBody>
@@ -2368,7 +2368,7 @@
           <a:lstStyle/>
           <a:p>
             <a:r>
-              <a:t>Aici neurobiologia devine relevantă clinic: veți prescrie amândouă clasele. Consecința o vedem pe diapozitivul următor.</a:t>
+              <a:t>Aici neurobiologia devine relevantă clinic: veți prescrie amândouă clasele. Consecința o vedem pe diapozitivul următor. Pentru benzodiazepine, subunitatea α1 explică dezinhibiția din ATV, la șoarece, nu recompensa în întregime.</a:t>
             </a:r>
           </a:p>
         </p:txBody>
@@ -2626,7 +2626,7 @@
           <a:lstStyle/>
           <a:p>
             <a:r>
-              <a:t>Avertismentul FDA: dependența fizică de benzodiazepine poate apărea chiar la administrarea conform prescripției, iar întreruperea bruscă sau reducerea prea rapidă a dozei poate produce reacții de sevraj, inclusiv convulsii, care pot pune viața în pericol. Doza se reduce treptat, după un plan individualizat și cu monitorizarea pacientului. Estimări de mortalitate nu am identificat: când lipsește cifra, spunem că lipsește.</a:t>
+              <a:t>În sevrajul alcoolic, benzodiazepinele sunt tratamentul de primă linie. Antipsihoticele se pot adăuga când delirul nu este controlat, dar nu ca tratament unic, pentru că scad pragul convulsivant (ghidul ASAM, 2020). Avertismentul FDA: dependența fizică de benzodiazepine poate apărea chiar la administrarea conform prescripției, iar întreruperea bruscă sau reducerea prea rapidă a dozei poate produce reacții de sevraj, inclusiv convulsii, care pot pune viața în pericol. Doza se reduce treptat, după un plan individualizat și cu monitorizarea pacientului. Estimări de mortalitate pentru sevrajul la benzodiazepine nu am identificat: când lipsește cifra, spunem că lipsește.</a:t>
             </a:r>
           </a:p>
         </p:txBody>
@@ -2970,7 +2970,7 @@
           <a:lstStyle/>
           <a:p>
             <a:r>
-              <a:t>A treia capcană, cea mai importantă din punct de vedere metodologic: distincția dintre transversal și longitudinal se aplică la tot restul cursului.</a:t>
+              <a:t>Al treilea titlu, cel mai important din punct de vedere metodologic: distincția dintre transversal și longitudinal se aplică la tot restul cursului. Reducerea disponibilității receptorilor D2 persistă luni după dezintoxicare și a fost observată și la rozătoare și la primate expuse repetat la droguri (Koob și Volkow, 2016): imaginea este reală; ce nu poate spune este ce a fost înainte de expunere.</a:t>
             </a:r>
           </a:p>
         </p:txBody>
@@ -3658,7 +3658,7 @@
           <a:lstStyle/>
           <a:p>
             <a:r>
-              <a:t>Probabil că pacienții voștri nu au auzit aceste date. Ele pot contrabalansa efectul secundar al modelului biogenetic, pe care îl vedeți peste câteva diapozitive (interpretare).</a:t>
+              <a:t>Probabil că pacienții voștri nu au auzit aceste date. Ele pot contrabalansa efectul secundar al modelului biogenetic, pe care îl vedeți peste câteva diapozitive (interpretare). Remisia înseamnă dispariția criteriilor, nu neapărat abstinența, iar mulți trec prin perioade de remisie și de recădere (Volkow și Blanco, 2023).</a:t>
             </a:r>
           </a:p>
         </p:txBody>
@@ -3830,7 +3830,7 @@
           <a:lstStyle/>
           <a:p>
             <a:r>
-              <a:t>A patra și ultima capcană a ședinței. Utilitatea scorului nu e în discuție; precizia lui aparentă, da (interpretare). Critica aparține lui Rolles și Measham (2011).</a:t>
+              <a:t>Al patrulea și ultimul titlu al ședinței. Utilitatea scorului nu e în discuție; precizia lui aparentă, da (interpretare). Critica aparține lui Rolles și Measham (2011). Studiile ulterioare (Europa 2015, Australia 2019, Noua Zeelandă 2023) plasează tot alcoolul pe primul loc, dar limitele metodei rămân; între autorii studiului din Noua Zeelandă se află și Nutt.</a:t>
             </a:r>
           </a:p>
         </p:txBody>
@@ -3916,7 +3916,7 @@
           <a:lstStyle/>
           <a:p>
             <a:r>
-              <a:t>Nu confundați cele două meta-analize ale lui Kvaale și ale colaboratorilor: dacă afirmați că explicația biologică crește pesimismul prognostic, citați meta-analiza din Clinical Psychology Review.</a:t>
+              <a:t>Nu confundați cele două meta-analize ale lui Kvaale și ale colaboratorilor: dacă afirmați că explicația biologică crește pesimismul prognostic, citați meta-analiza din Clinical Psychology Review. O meta-analiză din 2018 (Loughman și Haslam) a găsit că explicațiile neuroștiințifice nu au redus blamarea și au crescut distanța socială dorită, periculozitatea percepută și pesimismul.</a:t>
             </a:r>
           </a:p>
         </p:txBody>
@@ -4088,7 +4088,7 @@
           <a:lstStyle/>
           <a:p>
             <a:r>
-              <a:t>Formăm grupele prin numărare, de la unu la patru. Mai întâi primiți materialele, apoi vă explic sarcina.</a:t>
+              <a:t>Împărțim sala, pe rânduri, în patru zone. Vinieta apare pe ecran; nu se distribuie nimic tipărit. Mai întâi explic sarcina.</a:t>
             </a:r>
           </a:p>
         </p:txBody>
@@ -4174,7 +4174,7 @@
           <a:lstStyle/>
           <a:p>
             <a:r>
-              <a:t>În primele șase minute nu răspund la întrebări de conținut: totul este în materialele primite. La final, un reprezentant al fiecărei grupe citește cele trei concluzii; nu comentăm până la încheierea tuturor lecturilor.</a:t>
+              <a:t>În primele șase minute nu răspund la întrebări de conținut: totul este pe ecran. La final se proiectează cele patru distribuții de răspunsuri, una lângă alta; nu comentăm până la încheierea tuturor lecturilor.</a:t>
             </a:r>
           </a:p>
         </p:txBody>
@@ -4260,7 +4260,7 @@
           <a:lstStyle/>
           <a:p>
             <a:r>
-              <a:t>Tabloul clinic era identic. Aplicate corect, criteriile dau același rezultat la toate grupele: șase criterii, tulburare severă. La grupa C, regimul juridic depinde de proveniența medicamentului. Evaluarea consumatorului, de la articolul 19, se poate dispune numai când fapta intră sub incidența articolului 4.</a:t>
+              <a:t>Tabloul clinic era identic. Aplicate corect, criteriile dau același rezultat în toate zonele: șase criterii, tulburare severă. În zona C, regimul juridic depinde de proveniența medicamentului. Evaluarea consumatorului, de la articolul 19, se poate dispune numai când fapta intră sub incidența articolului 4.</a:t>
             </a:r>
           </a:p>
         </p:txBody>
@@ -4688,7 +4688,11 @@
         <p:txBody>
           <a:bodyPr/>
           <a:lstStyle/>
-          <a:p/>
+          <a:p>
+            <a:r>
+              <a:t>Mesajul clinic nu depinde de subunitate: dependența fizică de benzodiazepine poate apărea chiar conform prescripției (FDA, 2020), iar ghidul din 2025 recomandă întreruperea treptată.</a:t>
+            </a:r>
+          </a:p>
         </p:txBody>
       </p:sp>
       <p:sp>
@@ -4858,7 +4862,7 @@
           <a:lstStyle/>
           <a:p>
             <a:r>
-              <a:t>Dacă o cifră nu are sursă pe diapozitiv, întrebați. Registrul complet al surselor este în notele de curs de pe site-ul cursului. Fișa de reflecție se trimite prin e-mail în termen de 7 zile.</a:t>
+              <a:t>Dacă o cifră nu are sursă pe diapozitiv, întrebați. Registrul complet al surselor este în notele de curs de pe site-ul cursului. Evaluarea: policy brief de o pagină, 60%, și chestionar de 15 grile din cazurile din sală, 40%.</a:t>
             </a:r>
           </a:p>
         </p:txBody>
@@ -5517,7 +5521,7 @@
           <a:lstStyle/>
           <a:p>
             <a:r>
-              <a:t>În Vietnam, aproape jumătate dintre militari au încercat narcotice, iar unul din cinci a raportat dependență de opiacee. În primul an după întoarcerea acasă, 1% au redevenit dependenți de heroină: consumul și dependența au scăzut, în esență, la nivelurile dinaintea plecării.</a:t>
+              <a:t>În Vietnam, aproape jumătate dintre militari au încercat narcotice, iar unul din cinci a raportat dependență de opiacee. În primul an după întoarcerea acasă, numai 5% dintre cei dependenți în Vietnam mai erau dependenți: consumul și dependența au scăzut, în esență, la nivelurile dinaintea plecării.</a:t>
             </a:r>
           </a:p>
         </p:txBody>
@@ -5603,7 +5607,7 @@
           <a:lstStyle/>
           <a:p>
             <a:r>
-              <a:t>Nu răspund acum la această întrebare. Răspunsul se construiește pe parcursul celor două ore, iar votul îl reluăm în Sesiunea 7.</a:t>
+              <a:t>Nu răspund acum la această întrebare. Răspunsul se construiește pe parcursul celor două ore, iar votul îl reluăm în Sesiunea 7. Un răspuns provizoriu, pe care îl rafinăm în restul ședinței: o tulburare cu un substrat cerebral real, a cărei evoluție depinde de om, de substanță și de context (interpretare).</a:t>
             </a:r>
           </a:p>
         </p:txBody>
@@ -12447,7 +12451,7 @@
                 <a:ea typeface="Palatino Linotype" pitchFamily="34" charset="-122"/>
                 <a:cs typeface="Palatino Linotype" pitchFamily="34" charset="-120"/>
               </a:rPr>
-              <a:t>CAPCANA NR. 1</a:t>
+              <a:t>AȚI CREDE ACEST TITLU? · 1 DIN 4</a:t>
             </a:r>
             <a:endParaRPr lang="en-US" sz="1100" dirty="0"/>
           </a:p>
@@ -12486,7 +12490,7 @@
                 <a:ea typeface="Palatino Linotype" pitchFamily="34" charset="-122"/>
                 <a:cs typeface="Palatino Linotype" pitchFamily="34" charset="-120"/>
               </a:rPr>
-              <a:t>Citatul care confirmă perfect ce am vrea să credem</a:t>
+              <a:t>„Consilierul lui Nixon a recunoscut-o”</a:t>
             </a:r>
             <a:endParaRPr lang="en-US" sz="2900" dirty="0"/>
           </a:p>
@@ -16337,7 +16341,7 @@
                 <a:ea typeface="Palatino Linotype" pitchFamily="34" charset="-122"/>
                 <a:cs typeface="Palatino Linotype" pitchFamily="34" charset="-120"/>
               </a:rPr>
-              <a:t>2015–2016 · LANCET PSYCHIATRY</a:t>
+              <a:t>2013–2016 · LANCET PSYCHIATRY</a:t>
             </a:r>
             <a:endParaRPr lang="en-US" sz="1100" dirty="0"/>
           </a:p>
@@ -17919,7 +17923,7 @@
                 <a:ea typeface="Palatino Linotype" pitchFamily="34" charset="-122"/>
                 <a:cs typeface="Palatino Linotype" pitchFamily="34" charset="-120"/>
               </a:rPr>
-              <a:t>CAPCANA NR. 2</a:t>
+              <a:t>AȚI CREDE ACEST TITLU? · 2 DIN 4</a:t>
             </a:r>
             <a:endParaRPr lang="en-US" sz="1100" dirty="0"/>
           </a:p>
@@ -19998,7 +20002,7 @@
                 <a:ea typeface="Palatino Linotype" pitchFamily="34" charset="-122"/>
                 <a:cs typeface="Palatino Linotype" pitchFamily="34" charset="-120"/>
               </a:rPr>
-              <a:t>Engin și colab., 2014</a:t>
+              <a:t>Engin și colab., 2014 · Engin, 2023</a:t>
             </a:r>
             <a:endParaRPr lang="en-US" sz="950" dirty="0"/>
           </a:p>
@@ -20040,7 +20044,7 @@
                 <a:ea typeface="Palatino Linotype" pitchFamily="34" charset="-122"/>
                 <a:cs typeface="Palatino Linotype" pitchFamily="34" charset="-120"/>
               </a:rPr>
-              <a:t>La șoarece: modulare alosterică pozitivă a GABA-A pe interneuronii din VTA → dezinhibiție (α1). Efectul anxiolitic ține de α2, implicată și în recompensă.</a:t>
+              <a:t>La șoarece: modulare alosterică pozitivă a GABA-A pe interneuronii din VTA → dezinhibiție prin α1 (Tan 2010). Recompensa cere și α2, posibil α3 (Engin 2023).</a:t>
             </a:r>
             <a:endParaRPr lang="en-US" sz="1300" dirty="0"/>
           </a:p>
@@ -20495,7 +20499,7 @@
                 <a:ea typeface="Palatino Linotype" pitchFamily="34" charset="-122"/>
                 <a:cs typeface="Palatino Linotype" pitchFamily="34" charset="-120"/>
               </a:rPr>
-              <a:t>receptor GABA-A cu subunitatea α1 (dezinhibiția din ATV, la șoarece)</a:t>
+              <a:t>receptor GABA-A: α1 pentru dezinhibiția din ATV (șoarece); recompensa cere și α2, posibil α3</a:t>
             </a:r>
             <a:endParaRPr lang="en-US" sz="1250" dirty="0"/>
           </a:p>
@@ -21179,7 +21183,7 @@
                 <a:ea typeface="Palatino Linotype" pitchFamily="34" charset="-122"/>
                 <a:cs typeface="Palatino Linotype" pitchFamily="34" charset="-120"/>
               </a:rPr>
-              <a:t>Johnson și North, J Neurosci, 1992 · Tan și colab., Nature, 2010</a:t>
+              <a:t>Johnson și North, J Neurosci, 1992 · Tan și colab., Nature, 2010 · Engin, 2023</a:t>
             </a:r>
             <a:endParaRPr lang="en-US" sz="950" dirty="0"/>
           </a:p>
@@ -21460,7 +21464,7 @@
                 <a:ea typeface="Palatino Linotype" pitchFamily="34" charset="-122"/>
                 <a:cs typeface="Palatino Linotype" pitchFamily="34" charset="-120"/>
               </a:rPr>
-              <a:t>La șoarece: dezinhibiția dopaminergică prin α1; efectul anxiolitic prin α2, implicată și în recompensă.</a:t>
+              <a:t>FDA (2020), ghidul din 2025: dependența fizică poate apărea chiar conform prescripției.</a:t>
             </a:r>
             <a:endParaRPr lang="en-US" sz="1400" dirty="0"/>
           </a:p>
@@ -22711,7 +22715,7 @@
                 <a:ea typeface="Palatino Linotype" pitchFamily="34" charset="-122"/>
                 <a:cs typeface="Palatino Linotype" pitchFamily="34" charset="-120"/>
               </a:rPr>
-              <a:t>CE VĂ POATE OMORÎ PACIENTUL</a:t>
+              <a:t>CÂND SEVRAJUL POATE FI FATAL</a:t>
             </a:r>
             <a:endParaRPr lang="en-US" sz="1100" dirty="0"/>
           </a:p>
@@ -22789,7 +22793,7 @@
                 <a:ea typeface="Palatino Linotype" pitchFamily="34" charset="-122"/>
                 <a:cs typeface="Palatino Linotype" pitchFamily="34" charset="-120"/>
               </a:rPr>
-              <a:t>Meta-analiză a 9 studii prospective controlate.</a:t>
+              <a:t>Ghidul ASAM (2020) pentru sevrajul alcoolic.</a:t>
             </a:r>
             <a:endParaRPr lang="en-US" sz="1450" dirty="0"/>
           </a:p>
@@ -22862,7 +22866,7 @@
                 <a:ea typeface="Palatino Linotype" pitchFamily="34" charset="-122"/>
                 <a:cs typeface="Palatino Linotype" pitchFamily="34" charset="-120"/>
               </a:rPr>
-              <a:t>RR 6,6</a:t>
+              <a:t>Linia 1</a:t>
             </a:r>
             <a:endParaRPr lang="en-US" sz="4600" dirty="0"/>
           </a:p>
@@ -22904,7 +22908,7 @@
                 <a:ea typeface="Palatino Linotype" pitchFamily="34" charset="-122"/>
                 <a:cs typeface="Palatino Linotype" pitchFamily="34" charset="-120"/>
               </a:rPr>
-              <a:t>risc relativ de deces la tratament cu neuroleptice, comparativ cu sedativ-hipnotice</a:t>
+              <a:t>benzodiazepinele: tratamentul de primă linie în sevrajul alcoolic; reduc convulsiile și delirul</a:t>
             </a:r>
             <a:endParaRPr lang="en-US" sz="1150" dirty="0"/>
           </a:p>
@@ -22977,7 +22981,7 @@
                 <a:ea typeface="Palatino Linotype" pitchFamily="34" charset="-122"/>
                 <a:cs typeface="Palatino Linotype" pitchFamily="34" charset="-120"/>
               </a:rPr>
-              <a:t>0 / 217</a:t>
+              <a:t>Adjuvant</a:t>
             </a:r>
             <a:endParaRPr lang="en-US" sz="4600" dirty="0"/>
           </a:p>
@@ -23019,7 +23023,7 @@
                 <a:ea typeface="Palatino Linotype" pitchFamily="34" charset="-122"/>
                 <a:cs typeface="Palatino Linotype" pitchFamily="34" charset="-120"/>
               </a:rPr>
-              <a:t>decese la pacienții tratați cu benzodiazepine sau barbiturice</a:t>
+              <a:t>antipsihoticele: numai adăugate, nu ca tratament unic al delirului; scad pragul convulsivant</a:t>
             </a:r>
             <a:endParaRPr lang="en-US" sz="1150" dirty="0"/>
           </a:p>
@@ -23095,7 +23099,7 @@
                 <a:ea typeface="Palatino Linotype" pitchFamily="34" charset="-122"/>
                 <a:cs typeface="Palatino Linotype" pitchFamily="34" charset="-120"/>
               </a:rPr>
-              <a:t>Mayo-Smith și colab., Arch Intern Med, 2004</a:t>
+              <a:t>ASAM, J Addict Med, 2020</a:t>
             </a:r>
             <a:endParaRPr lang="en-US" sz="1200" dirty="0"/>
           </a:p>
@@ -23115,7 +23119,7 @@
                 <a:ea typeface="Palatino Linotype" pitchFamily="34" charset="-122"/>
                 <a:cs typeface="Palatino Linotype" pitchFamily="34" charset="-120"/>
               </a:rPr>
-              <a:t>Delirul de sevraj alcoolic este forma cea mai gravă; dovezile sugerează că îngrijirea adecvată reduce mortalitatea.</a:t>
+              <a:t>Sevrajul alcoolic sever poate pune viața în pericol: convulsii, delir, deces.</a:t>
             </a:r>
             <a:endParaRPr lang="en-US" sz="1200" dirty="0"/>
           </a:p>
@@ -23301,7 +23305,7 @@
                 <a:ea typeface="Palatino Linotype" pitchFamily="34" charset="-122"/>
                 <a:cs typeface="Palatino Linotype" pitchFamily="34" charset="-120"/>
               </a:rPr>
-              <a:t>Sevrajul la opioide, „severely distressing”, prin hiperactivitate noradrenergică: Kosten și Baxter, Am J Addict, 2019 · Darke și colab., Addiction, 2017: „Yes, people can die from opiate withdrawal” · FDA, comunicare de siguranță, 2020 · ghidul ASAM, J Gen Intern Med, 2025</a:t>
+              <a:t>Sevrajul la opioide, „severely distressing”, prin hiperactivitate noradrenergică: Kosten și Baxter, Am J Addict, 2019 · FDA, comunicare de siguranță, 2020 · ghidul ASAM pentru alcool, J Addict Med, 2020 · ghidul ASAM pentru benzodiazepine, J Gen Intern Med, 2025</a:t>
             </a:r>
             <a:endParaRPr lang="en-US" sz="950" dirty="0"/>
           </a:p>
@@ -25705,7 +25709,7 @@
                 <a:ea typeface="Palatino Linotype" pitchFamily="34" charset="-122"/>
                 <a:cs typeface="Palatino Linotype" pitchFamily="34" charset="-120"/>
               </a:rPr>
-              <a:t>CAPCANA NR. 3</a:t>
+              <a:t>AȚI CREDE ACEST TITLU? · 3 DIN 4</a:t>
             </a:r>
             <a:endParaRPr lang="en-US" sz="1100" dirty="0"/>
           </a:p>
@@ -25744,7 +25748,7 @@
                 <a:ea typeface="Palatino Linotype" pitchFamily="34" charset="-122"/>
                 <a:cs typeface="Palatino Linotype" pitchFamily="34" charset="-120"/>
               </a:rPr>
-              <a:t>O imagine adevărată, pentru o afirmație pe care nu o susține</a:t>
+              <a:t>„Iată ce fac drogurile creierului tău”</a:t>
             </a:r>
             <a:endParaRPr lang="en-US" sz="2800" dirty="0"/>
           </a:p>
@@ -40722,7 +40726,7 @@
               <a:buNone/>
             </a:pPr>
             <a:r>
-              <a:rPr lang="en-US" sz="1300" dirty="0">
+              <a:rPr lang="en-US" sz="1200" dirty="0">
                 <a:solidFill>
                   <a:srgbClr val="959BB0"/>
                 </a:solidFill>
@@ -40730,7 +40734,7 @@
                 <a:ea typeface="Palatino Linotype" pitchFamily="34" charset="-122"/>
                 <a:cs typeface="Palatino Linotype" pitchFamily="34" charset="-120"/>
               </a:rPr>
-              <a:t>Probabilitatea cumulativă de remisie pe durata vieții; la 10 ani: 18,4% · 37,4% · 66,2% · 75,8%. Timp median: ≈ 26 · 14 · 6 · 5 ani.</a:t>
+              <a:t>Remisie = dispariția criteriilor, nu neapărat abstinența. La 10 ani: 18,4% (nicotină) · 37,4% · 66,2% · 75,8%; mediană ≈ 26 · 14 · 6 · 5 ani.</a:t>
             </a:r>
             <a:endParaRPr lang="en-US" sz="1300" dirty="0"/>
           </a:p>
@@ -40806,7 +40810,7 @@
                 <a:ea typeface="Palatino Linotype" pitchFamily="34" charset="-122"/>
                 <a:cs typeface="Palatino Linotype" pitchFamily="34" charset="-120"/>
               </a:rPr>
-              <a:t>Heyman, reanalizând anchete naționale: timp de înjumătățire de patru ani pentru dependența de cocaină și de 16 ani pentru alcool; în fiecare an intră în remisie o proporție constantă dintre persoanele încă dependente.</a:t>
+              <a:t>Heyman a reanalizat aceleași date NESARC (nu e o confirmare independentă): timp de înjumătățire de 4 ani la cocaină, 6 la canabis, 16 la alcool. Mulți trec prin perioade de remisie și de recădere (Volkow și Blanco, 2023).</a:t>
             </a:r>
             <a:endParaRPr lang="en-US" sz="1350" dirty="0"/>
           </a:p>
@@ -40953,7 +40957,7 @@
                 <a:ea typeface="Palatino Linotype" pitchFamily="34" charset="-122"/>
                 <a:cs typeface="Palatino Linotype" pitchFamily="34" charset="-120"/>
               </a:rPr>
-              <a:t>Lopez-Quintero și colab., Addiction, 2011 · Heyman, Annu Rev Clin Psychol, 2013</a:t>
+              <a:t>Lopez-Quintero și colab., Addiction, 2011 · Heyman, Front Psychiatry, 2013 · Volkow și Blanco, World Psychiatry, 2023</a:t>
             </a:r>
             <a:endParaRPr lang="en-US" sz="950" dirty="0"/>
           </a:p>
@@ -42547,7 +42551,7 @@
                 <a:ea typeface="Palatino Linotype" pitchFamily="34" charset="-122"/>
                 <a:cs typeface="Palatino Linotype" pitchFamily="34" charset="-120"/>
               </a:rPr>
-              <a:t>CAPCANA NR. 4</a:t>
+              <a:t>AȚI CREDE ACEST TITLU? · 4 DIN 4</a:t>
             </a:r>
             <a:endParaRPr lang="en-US" sz="1100" dirty="0"/>
           </a:p>
@@ -42586,7 +42590,7 @@
                 <a:ea typeface="Palatino Linotype" pitchFamily="34" charset="-122"/>
                 <a:cs typeface="Palatino Linotype" pitchFamily="34" charset="-120"/>
               </a:rPr>
-              <a:t>O cifră excelentă, produsă printr-o metodă mult mai slabă</a:t>
+              <a:t>„Alcoolul, 72 de puncte”</a:t>
             </a:r>
             <a:endParaRPr lang="en-US" sz="3000" dirty="0"/>
           </a:p>
@@ -43004,7 +43008,7 @@
                 <a:ea typeface="Palatino Linotype" pitchFamily="34" charset="-122"/>
                 <a:cs typeface="Palatino Linotype" pitchFamily="34" charset="-120"/>
               </a:rPr>
-              <a:t>Metodă delphică, foarte vulnerabilă la judecăți subiective</a:t>
+              <a:t>Consens între experți, foarte vulnerabil la judecăți subiective</a:t>
             </a:r>
             <a:endParaRPr lang="en-US" sz="1250" dirty="0"/>
           </a:p>
@@ -43163,7 +43167,7 @@
                 <a:ea typeface="Palatino Linotype" pitchFamily="34" charset="-122"/>
                 <a:cs typeface="Palatino Linotype" pitchFamily="34" charset="-120"/>
               </a:rPr>
-              <a:t>Nutt și colab., Lancet, 2010 · critica: Rolles și Measham, Int J Drug Policy, 2011</a:t>
+              <a:t>Nutt și colab., Lancet, 2010 · critica: Rolles și Measham, Int J Drug Policy, 2011 · Crossin și colab., J Psychopharmacol, 2023</a:t>
             </a:r>
             <a:endParaRPr lang="en-US" sz="950" dirty="0"/>
           </a:p>
@@ -43779,7 +43783,7 @@
                 <a:ea typeface="Palatino Linotype" pitchFamily="34" charset="-122"/>
                 <a:cs typeface="Palatino Linotype" pitchFamily="34" charset="-120"/>
               </a:rPr>
-              <a:t>Sunt estimări de model, obținute din date de mortalitate și de morbiditate, nu prin acordul unor experți; intervalele de incertitudine publicate de IHME pentru România nu au putut fi confirmate într-o sursă publică și nu sunt reproduse aici (intervalul global de pe diapozitivul 39 provine din raportul UNODC, nu din profilul de țară). Ordinea alcool–droguri este aceeași ca în scorul experților (interpretare).</a:t>
+              <a:t>Sunt estimări de model, nu un acord de experți. Intervale de incertitudine (IHME, GBD 2023): alcool 67 800 (51 400–86 700); droguri 17 700 (14 300–21 400). Ordinea alcool–droguri este aceeași ca în scorul experților (interpretare).</a:t>
             </a:r>
             <a:endParaRPr lang="en-US" sz="1150" dirty="0"/>
           </a:p>
@@ -43968,7 +43972,7 @@
                 <a:ea typeface="Palatino Linotype" pitchFamily="34" charset="-122"/>
                 <a:cs typeface="Palatino Linotype" pitchFamily="34" charset="-120"/>
               </a:rPr>
-              <a:t>Meta-analiză a 28 de studii experimentale despre problemele psihice. N = 1 207–3 469, în funcție de rezultat.</a:t>
+              <a:t>Meta-analiză a 28 de studii experimentale despre problemele psihice.</a:t>
             </a:r>
             <a:endParaRPr lang="en-US" sz="1450" dirty="0"/>
           </a:p>
@@ -44302,7 +44306,7 @@
                 <a:ea typeface="Palatino Linotype" pitchFamily="34" charset="-122"/>
                 <a:cs typeface="Palatino Linotype" pitchFamily="34" charset="-120"/>
               </a:rPr>
-              <a:t>Stereotipul de periculozitate  —  crește (posibil bias de publicare)</a:t>
+              <a:t>Periculozitatea percepută  —  crește</a:t>
             </a:r>
             <a:endParaRPr lang="en-US" sz="1250" dirty="0"/>
           </a:p>
@@ -44487,7 +44491,7 @@
                 <a:ea typeface="Palatino Linotype" pitchFamily="34" charset="-122"/>
                 <a:cs typeface="Palatino Linotype" pitchFamily="34" charset="-120"/>
               </a:rPr>
-              <a:t>În studiile despre problemele psihice, explicația biologică a redus blamarea, dar a întărit pesimismul privind schimbarea și, mai incert, percepția periculozității. Soluția propusă: explicația biologică, însoțită de datele despre remisie (interpretare).</a:t>
+              <a:t>În studiile despre problemele psihice, explicația biologică a redus blamarea, dar a întărit pesimismul privind schimbarea și a crescut periculozitatea percepută. Soluția propusă: explicația biologică, însoțită de datele despre remisie (interpretare).</a:t>
             </a:r>
             <a:endParaRPr lang="en-US" sz="1350" dirty="0"/>
           </a:p>
@@ -44526,7 +44530,7 @@
                 <a:ea typeface="Palatino Linotype" pitchFamily="34" charset="-122"/>
                 <a:cs typeface="Palatino Linotype" pitchFamily="34" charset="-120"/>
               </a:rPr>
-              <a:t>Kvaale și colab., Clin Psychol Rev, 2013 (g Hedges) · a nu se confunda cu meta-analiza corelațională a acelorași autori (Soc Sci Med, 2013), care raportează r și nu măsoară pesimismul privind prognosticul</a:t>
+              <a:t>Kvaale și colab., Clin Psychol Rev, 2013 (g Hedges), reanalizată de Loughman și Haslam, 2018 · a nu se confunda cu meta-analiza corelațională a acelorași autori (Soc Sci Med, 2013)</a:t>
             </a:r>
             <a:endParaRPr lang="en-US" sz="950" dirty="0"/>
           </a:p>
@@ -45808,7 +45812,7 @@
                 <a:ea typeface="Palatino Linotype" pitchFamily="34" charset="-122"/>
                 <a:cs typeface="Palatino Linotype" pitchFamily="34" charset="-120"/>
               </a:rPr>
-              <a:t>Același dosar, patru substanțe. 18 minute, în grupe de 3–4.</a:t>
+              <a:t>Același dosar, patru substanțe. 18 minute, în perechi, pe patru zone ale sălii.</a:t>
             </a:r>
             <a:endParaRPr lang="en-US" sz="1500" dirty="0"/>
           </a:p>
@@ -45953,7 +45957,7 @@
                 <a:ea typeface="Palatino Linotype" pitchFamily="34" charset="-122"/>
                 <a:cs typeface="Palatino Linotype" pitchFamily="34" charset="-120"/>
               </a:rPr>
-              <a:t>GRUPE DE 3–4 · 18 MIN</a:t>
+              <a:t>PERECHI · 4 ZONE · 18 MIN</a:t>
             </a:r>
             <a:endParaRPr lang="en-US" sz="1000" dirty="0"/>
           </a:p>
@@ -46097,7 +46101,7 @@
                 <a:ea typeface="Palatino Linotype" pitchFamily="34" charset="-122"/>
                 <a:cs typeface="Palatino Linotype" pitchFamily="34" charset="-120"/>
               </a:rPr>
-              <a:t>GRUPA A</a:t>
+              <a:t>ZONA A</a:t>
             </a:r>
             <a:endParaRPr lang="en-US" sz="950" dirty="0"/>
           </a:p>
@@ -46244,7 +46248,7 @@
                 <a:ea typeface="Palatino Linotype" pitchFamily="34" charset="-122"/>
                 <a:cs typeface="Palatino Linotype" pitchFamily="34" charset="-120"/>
               </a:rPr>
-              <a:t>GRUPA B</a:t>
+              <a:t>ZONA B</a:t>
             </a:r>
             <a:endParaRPr lang="en-US" sz="950" dirty="0"/>
           </a:p>
@@ -46391,7 +46395,7 @@
                 <a:ea typeface="Palatino Linotype" pitchFamily="34" charset="-122"/>
                 <a:cs typeface="Palatino Linotype" pitchFamily="34" charset="-120"/>
               </a:rPr>
-              <a:t>GRUPA C</a:t>
+              <a:t>ZONA C</a:t>
             </a:r>
             <a:endParaRPr lang="en-US" sz="950" dirty="0"/>
           </a:p>
@@ -46558,7 +46562,7 @@
                 <a:ea typeface="Palatino Linotype" pitchFamily="34" charset="-122"/>
                 <a:cs typeface="Palatino Linotype" pitchFamily="34" charset="-120"/>
               </a:rPr>
-              <a:t>GRUPA D</a:t>
+              <a:t>ZONA D</a:t>
             </a:r>
             <a:endParaRPr lang="en-US" sz="950" dirty="0"/>
           </a:p>
@@ -46693,7 +46697,7 @@
                 <a:ea typeface="Palatino Linotype" pitchFamily="34" charset="-122"/>
                 <a:cs typeface="Palatino Linotype" pitchFamily="34" charset="-120"/>
               </a:rPr>
-              <a:t>VINIETA — fictivă, identică pentru toate grupele</a:t>
+              <a:t>VINIETA — fictivă, pe ecran, identică pentru toate zonele</a:t>
             </a:r>
             <a:endParaRPr lang="en-US" sz="950" dirty="0"/>
           </a:p>
@@ -46847,7 +46851,7 @@
                 <a:ea typeface="Palatino Linotype" pitchFamily="34" charset="-122"/>
                 <a:cs typeface="Palatino Linotype" pitchFamily="34" charset="-120"/>
               </a:rPr>
-              <a:t>Bifați criteriile DSM-5-TR îndeplinite din cele 11. Scrieți numărul total și severitatea.</a:t>
+              <a:t>Cu colegul de bancă: criteriile DSM-5-TR îndeplinite din cele 11, numărul lor și severitatea. Vot pe telefon.</a:t>
             </a:r>
             <a:endParaRPr lang="en-US" sz="1250" dirty="0"/>
           </a:p>
@@ -46959,7 +46963,7 @@
                 <a:ea typeface="Palatino Linotype" pitchFamily="34" charset="-122"/>
                 <a:cs typeface="Palatino Linotype" pitchFamily="34" charset="-120"/>
               </a:rPr>
-              <a:t>Ce se întâmplă cu M. în sistemul JURIDIC românesc? Folosiți art. 4 din Legea 143/2000, tipărit.</a:t>
+              <a:t>Ce se întâmplă cu M. în sistemul JURIDIC românesc? Folosiți art. 4 din Legea 143/2000, afișat pe ecran. Vot pe telefon, pe zone.</a:t>
             </a:r>
             <a:endParaRPr lang="en-US" sz="1250" dirty="0"/>
           </a:p>
@@ -47183,7 +47187,7 @@
                 <a:ea typeface="Palatino Linotype" pitchFamily="34" charset="-122"/>
                 <a:cs typeface="Palatino Linotype" pitchFamily="34" charset="-120"/>
               </a:rPr>
-              <a:t>Un reprezentant al fiecărei grupe citește cele trei concluzii. Fără comentarii până la încheierea tuturor lecturilor.</a:t>
+              <a:t>Se proiectează cele patru distribuții de răspunsuri, una lângă alta. Fără comentarii până la încheierea tuturor lecturilor.</a:t>
             </a:r>
             <a:endParaRPr lang="en-US" sz="1250" dirty="0"/>
           </a:p>
@@ -47222,7 +47226,7 @@
                 <a:ea typeface="Palatino Linotype" pitchFamily="34" charset="-122"/>
                 <a:cs typeface="Palatino Linotype" pitchFamily="34" charset="-120"/>
               </a:rPr>
-              <a:t>Nu se administrează niciun instrument de screening participanților din sală, nici anonim. Se lucrează exclusiv pe vinieta tipărită. Grupele NU știu că tabloul clinic este identic.</a:t>
+              <a:t>Nu se administrează niciun instrument de screening participanților din sală, nici anonim. Se lucrează exclusiv pe vinieta de pe ecran. Zonele NU știu că tabloul clinic este identic.</a:t>
             </a:r>
             <a:endParaRPr lang="en-US" sz="950" dirty="0"/>
           </a:p>
@@ -48052,7 +48056,7 @@
                 <a:ea typeface="Palatino Linotype" pitchFamily="34" charset="-122"/>
                 <a:cs typeface="Palatino Linotype" pitchFamily="34" charset="-120"/>
               </a:rPr>
-              <a:t>Aplicate corect, criteriile dau același rezultat la toate grupele: șase criterii, aceeași severitate. Este aceeași vinietă.</a:t>
+              <a:t>Aplicate corect, criteriile dau același rezultat în toate zonele: șase criterii, aceeași severitate. Este aceeași vinietă.</a:t>
             </a:r>
             <a:endParaRPr lang="en-US" sz="1450" dirty="0"/>
           </a:p>
@@ -48877,7 +48881,7 @@
                 <a:ea typeface="Palatino Linotype" pitchFamily="34" charset="-122"/>
                 <a:cs typeface="Palatino Linotype" pitchFamily="34" charset="-120"/>
               </a:rPr>
-              <a:t>20% · 1%</a:t>
+              <a:t>20% · 5%</a:t>
             </a:r>
             <a:endParaRPr lang="en-US" sz="2300" dirty="0"/>
           </a:p>
@@ -48916,7 +48920,7 @@
                 <a:ea typeface="Palatino Linotype" pitchFamily="34" charset="-122"/>
                 <a:cs typeface="Palatino Linotype" pitchFamily="34" charset="-120"/>
               </a:rPr>
-              <a:t>Dependență raportată în Vietnam; redevenire a dependenței de heroină în primul an acasă</a:t>
+              <a:t>Consumatori regulați în Vietnam; încă dependenți în primul an acasă, dintre cei dependenți acolo</a:t>
             </a:r>
             <a:endParaRPr lang="en-US" sz="1350" dirty="0"/>
           </a:p>
@@ -49223,7 +49227,7 @@
                 <a:ea typeface="Palatino Linotype" pitchFamily="34" charset="-122"/>
                 <a:cs typeface="Palatino Linotype" pitchFamily="34" charset="-120"/>
               </a:rPr>
-              <a:t>Remisia este evoluția cea mai frecventă (proiecții, SUA); ponderea remisiilor fără tratament nu a fost verificată.</a:t>
+              <a:t>Remisia (nu neapărat abstinența) este evoluția cea mai frecventă (proiecții, SUA); mulți trec și prin recăderi.</a:t>
             </a:r>
             <a:endParaRPr lang="en-US" sz="1200" dirty="0"/>
           </a:p>
@@ -49530,7 +49534,7 @@
                 <a:ea typeface="Palatino Linotype" pitchFamily="34" charset="-122"/>
                 <a:cs typeface="Palatino Linotype" pitchFamily="34" charset="-120"/>
               </a:rPr>
-              <a:t>Surse: Robins și colab., 1975; Hall și Weier, 2017; Lopez-Quintero și colab., 2011a și 2011b</a:t>
+              <a:t>Surse: Robins și colab., 1975; Heather, 2017; Lopez-Quintero și colab., 2011a și 2011b</a:t>
             </a:r>
             <a:endParaRPr lang="en-US" sz="950" dirty="0"/>
           </a:p>
@@ -50013,7 +50017,7 @@
                 <a:ea typeface="Palatino Linotype" pitchFamily="34" charset="-122"/>
                 <a:cs typeface="Palatino Linotype" pitchFamily="34" charset="-120"/>
               </a:rPr>
-              <a:t>În două ore am întâlnit patru situații, cu cifre, un citat și o imagine, care nu susțin tot ce li se atribuie. Din Sesiunea 2, le găsiți voi, într-un raport oficial.</a:t>
+              <a:t>În două ore am întâlnit patru titluri, cu cifre, un citat și o imagine, care nu susțin tot ce li se atribuie. Din Sesiunea 2, le găsiți voi, într-un raport oficial.</a:t>
             </a:r>
             <a:endParaRPr lang="en-US" sz="1250" dirty="0"/>
           </a:p>
@@ -50446,7 +50450,7 @@
                 <a:ea typeface="Palatino Linotype" pitchFamily="34" charset="-122"/>
                 <a:cs typeface="Palatino Linotype" pitchFamily="34" charset="-120"/>
               </a:rPr>
-              <a:t>Mecanismul prin care benzodiazepinele dezinhibă, la șoarece, neuronul dopaminergic din VTA prin subunitatea α1 are aceeași structură ca mecanismul agoniștilor opioizi μ (la șobolan): ambele acționează asupra interneuronilor GABA-ergici. Extinderea la alprazolam și la om este o inferență.</a:t>
+              <a:t>Benzodiazepinele dezinhibă, la șoarece, neuronul dopaminergic din VTA prin subunitatea α1, ca agoniștii opioizi μ (la șobolan): ambele acționează asupra interneuronilor GABA-ergici. Recompensa cere și α2, posibil α3. Extinderea la alprazolam și la om este o inferență.</a:t>
             </a:r>
             <a:endParaRPr lang="en-US" sz="1700" dirty="0"/>
           </a:p>
@@ -50488,7 +50492,7 @@
                 <a:ea typeface="Palatino Linotype" pitchFamily="34" charset="-122"/>
                 <a:cs typeface="Palatino Linotype" pitchFamily="34" charset="-120"/>
               </a:rPr>
-              <a:t>Diferența dintre pacientul de la Grupa C și pacientul de la Grupa D</a:t>
+              <a:t>Diferența dintre pacientul din varianta C și cel din varianta D</a:t>
             </a:r>
             <a:endParaRPr lang="en-US" sz="2200" dirty="0"/>
           </a:p>
@@ -50508,7 +50512,7 @@
                 <a:ea typeface="Palatino Linotype" pitchFamily="34" charset="-122"/>
                 <a:cs typeface="Palatino Linotype" pitchFamily="34" charset="-120"/>
               </a:rPr>
-              <a:t>nu a fost creierul. A fost cine a semnat prima dată (interpretare).</a:t>
+              <a:t>nu a fost creierul. A fost calea de acces: rețeta, față de piața ilicită (interpretare).</a:t>
             </a:r>
             <a:endParaRPr lang="en-US" sz="2200" dirty="0"/>
           </a:p>
@@ -52323,7 +52327,7 @@
                 <a:ea typeface="Palatino Linotype" pitchFamily="34" charset="-122"/>
                 <a:cs typeface="Palatino Linotype" pitchFamily="34" charset="-120"/>
               </a:rPr>
-              <a:t>Di Chiara &amp; Imperato 1988 · Johnson &amp; North 1992 · Ritz 1987 · Picciotto 1998 · Tapper 2004 · Pertwee 2008 · Vengeliene 2008 · Tan 2010 · Löw 2000 · Engin 2014 · Pfeiffer 1986 · Ribeiro 2010</a:t>
+              <a:t>Di Chiara &amp; Imperato 1988 · Johnson &amp; North 1992 · Ritz 1987 · Picciotto 1998 · Tapper 2004 · Pertwee 2008 · Vengeliene 2008 · Tan 2010 · Löw 2000 · Engin 2014 și 2023 · Pfeiffer 1986 · Ribeiro 2010 · Volkow, Michaelides și Baler 2019</a:t>
             </a:r>
             <a:endParaRPr lang="en-US" sz="1100" dirty="0"/>
           </a:p>
@@ -52609,7 +52613,7 @@
               <a:buNone/>
             </a:pPr>
             <a:r>
-              <a:rPr lang="en-US" sz="1100" dirty="0">
+              <a:rPr lang="en-US" sz="1000" dirty="0">
                 <a:solidFill>
                   <a:srgbClr val="959BB0"/>
                 </a:solidFill>
@@ -52617,7 +52621,7 @@
                 <a:ea typeface="Palatino Linotype" pitchFamily="34" charset="-122"/>
                 <a:cs typeface="Palatino Linotype" pitchFamily="34" charset="-120"/>
               </a:rPr>
-              <a:t>Robins 1975 și 1993 · Hall și Weier 2017 · Lopez-Quintero 2011 ×2 · Heyman 2013 · Leshner 1997 · Koob și Le Moal 1997, 2001 · Koob și Volkow 2016 · Hall 2015 · Kvaale 2013 ×2 · Nutt 2010 · Rolles și Measham 2011 · UNODC 2026 · EUDA 2026 · ANPCDDA 2025 · GBD 2023</a:t>
+              <a:t>Robins 1975 și 1993 · Heather 2017 · Lopez-Quintero 2011 ×2 · Volkow și Blanco 2023 · Heyman 2013 · Leshner 1997 · Koob și Le Moal 1997, 2001 · Koob și Volkow 2016 · Hall 2015 · Kvaale 2013 ×2 · Loughman și Haslam 2018 · Nutt 2010 · Crossin 2023 · Rolles și Measham 2011 · UNODC 2026 · EUDA 2026 · ANPCDDA 2025 · GBD 2023</a:t>
             </a:r>
             <a:endParaRPr lang="en-US" sz="1100" dirty="0"/>
           </a:p>
@@ -52764,7 +52768,7 @@
                 <a:ea typeface="Palatino Linotype" pitchFamily="34" charset="-122"/>
                 <a:cs typeface="Palatino Linotype" pitchFamily="34" charset="-120"/>
               </a:rPr>
-              <a:t>Nixon, transcript din 17 iunie 1971 · Legea nr. 143/2000 (art. 1, 4, 19; art. 27 în 2000) · Legile 522/2004 și 187/2012 · DSM-5-TR 2022, prin Hasin 2013 și ghidul NYSDOH · FDA 2020 · ghidul ASAM 2025 · CMS (legea parității)</a:t>
+              <a:t>Nixon, transcript din 17 iunie 1971 · Legea nr. 143/2000 (art. 1, 4, 19; art. 27 în 2000) · Legile 522/2004 și 187/2012 · DSM-5-TR 2022, prin Hasin 2013 și ghidul NYSDOH · FDA 2020 · ghidul ASAM 2020 (alcool) și 2025 (benzodiazepine) · CMS (legea parității)</a:t>
             </a:r>
             <a:endParaRPr lang="en-US" sz="1100" dirty="0"/>
           </a:p>
@@ -52854,7 +52858,7 @@
                 <a:ea typeface="Palatino Linotype" pitchFamily="34" charset="-122"/>
                 <a:cs typeface="Palatino Linotype" pitchFamily="34" charset="-120"/>
               </a:rPr>
-              <a:t>Fișa de reflecție: prin e-mail, în 7 zile; grila vine odată cu ea, iar policy brief-ul se evaluează în Sesiunea 7.</a:t>
+              <a:t>Evaluarea: policy brief de o pagină (60%) și chestionar de 15 grile din cazurile din sală (40%); dezbaterile nu se notează.</a:t>
             </a:r>
             <a:endParaRPr lang="en-US" sz="1200" dirty="0"/>
           </a:p>
@@ -53879,7 +53883,7 @@
                 <a:ea typeface="Palatino Linotype" pitchFamily="34" charset="-122"/>
                 <a:cs typeface="Palatino Linotype" pitchFamily="34" charset="-120"/>
               </a:rPr>
-              <a:t>1%</a:t>
+              <a:t>5%</a:t>
             </a:r>
             <a:endParaRPr lang="en-US" sz="19000" dirty="0"/>
           </a:p>
@@ -53918,7 +53922,7 @@
                 <a:ea typeface="Palatino Linotype" pitchFamily="34" charset="-122"/>
                 <a:cs typeface="Palatino Linotype" pitchFamily="34" charset="-120"/>
               </a:rPr>
-              <a:t>Hall și Weier, Addiction, 2017 · după studiile lui Robins (1975, 1993)</a:t>
+              <a:t>Heather, Addictive Behaviors Reports, 2017 · după datele lui Robins (1975)</a:t>
             </a:r>
             <a:endParaRPr lang="en-US" sz="950" dirty="0"/>
           </a:p>
@@ -54029,7 +54033,7 @@
                 <a:ea typeface="Palatino Linotype" pitchFamily="34" charset="-122"/>
                 <a:cs typeface="Palatino Linotype" pitchFamily="34" charset="-120"/>
               </a:rPr>
-              <a:t>898 de militari întorși din Vietnam, septembrie 1971</a:t>
+              <a:t>898 de interviuri cu militari întorși din Vietnam, lucrarea din 1975</a:t>
             </a:r>
             <a:endParaRPr lang="en-US" sz="2800" dirty="0"/>
           </a:p>
@@ -54102,7 +54106,7 @@
                 <a:ea typeface="Palatino Linotype" pitchFamily="34" charset="-122"/>
                 <a:cs typeface="Palatino Linotype" pitchFamily="34" charset="-120"/>
               </a:rPr>
-              <a:t>&lt; 1%</a:t>
+              <a:t>1%</a:t>
             </a:r>
             <a:endParaRPr lang="en-US" sz="3800" dirty="0"/>
           </a:p>
@@ -54144,7 +54148,7 @@
                 <a:ea typeface="Palatino Linotype" pitchFamily="34" charset="-122"/>
                 <a:cs typeface="Palatino Linotype" pitchFamily="34" charset="-120"/>
               </a:rPr>
-              <a:t>fuseseră vreodată dependenți de narcotice înainte de Vietnam</a:t>
+              <a:t>consumaseră regulat opiacee înainte de înrolare</a:t>
             </a:r>
             <a:endParaRPr lang="en-US" sz="1150" dirty="0"/>
           </a:p>
@@ -54217,7 +54221,7 @@
                 <a:ea typeface="Palatino Linotype" pitchFamily="34" charset="-122"/>
                 <a:cs typeface="Palatino Linotype" pitchFamily="34" charset="-120"/>
               </a:rPr>
-              <a:t>34%</a:t>
+              <a:t>20%</a:t>
             </a:r>
             <a:endParaRPr lang="en-US" sz="3800" dirty="0"/>
           </a:p>
@@ -54259,7 +54263,7 @@
                 <a:ea typeface="Palatino Linotype" pitchFamily="34" charset="-122"/>
                 <a:cs typeface="Palatino Linotype" pitchFamily="34" charset="-120"/>
               </a:rPr>
-              <a:t>au consumat heroină în Vietnam</a:t>
+              <a:t>au devenit consumatori regulați în Vietnam</a:t>
             </a:r>
             <a:endParaRPr lang="en-US" sz="1150" dirty="0"/>
           </a:p>
@@ -54332,7 +54336,7 @@
                 <a:ea typeface="Palatino Linotype" pitchFamily="34" charset="-122"/>
                 <a:cs typeface="Palatino Linotype" pitchFamily="34" charset="-120"/>
               </a:rPr>
-              <a:t>20%</a:t>
+              <a:t>14%</a:t>
             </a:r>
             <a:endParaRPr lang="en-US" sz="3800" dirty="0"/>
           </a:p>
@@ -54374,7 +54378,7 @@
                 <a:ea typeface="Palatino Linotype" pitchFamily="34" charset="-122"/>
                 <a:cs typeface="Palatino Linotype" pitchFamily="34" charset="-120"/>
               </a:rPr>
-              <a:t>au raportat dependență de opiacee în Vietnam</a:t>
+              <a:t>dintre cei cu test urinar pozitiv la plecare au redevenit dependenți</a:t>
             </a:r>
             <a:endParaRPr lang="en-US" sz="1150" dirty="0"/>
           </a:p>
@@ -54447,7 +54451,7 @@
                 <a:ea typeface="Palatino Linotype" pitchFamily="34" charset="-122"/>
                 <a:cs typeface="Palatino Linotype" pitchFamily="34" charset="-120"/>
               </a:rPr>
-              <a:t>10%</a:t>
+              <a:t>88%</a:t>
             </a:r>
             <a:endParaRPr lang="en-US" sz="3800" dirty="0"/>
           </a:p>
@@ -54489,7 +54493,7 @@
                 <a:ea typeface="Palatino Linotype" pitchFamily="34" charset="-122"/>
                 <a:cs typeface="Palatino Linotype" pitchFamily="34" charset="-120"/>
               </a:rPr>
-              <a:t>au încercat heroina după întoarcere</a:t>
+              <a:t>nu reluaseră consumul regulat de opiacee la trei ani</a:t>
             </a:r>
             <a:endParaRPr lang="en-US" sz="1150" dirty="0"/>
           </a:p>
@@ -54601,7 +54605,7 @@
                 <a:ea typeface="Palatino Linotype" pitchFamily="34" charset="-122"/>
                 <a:cs typeface="Palatino Linotype" pitchFamily="34" charset="-120"/>
               </a:rPr>
-              <a:t>1%</a:t>
+              <a:t>5%</a:t>
             </a:r>
             <a:endParaRPr lang="en-US" sz="7400" dirty="0"/>
           </a:p>
@@ -54643,7 +54647,7 @@
                 <a:ea typeface="Palatino Linotype" pitchFamily="34" charset="-122"/>
                 <a:cs typeface="Palatino Linotype" pitchFamily="34" charset="-120"/>
               </a:rPr>
-              <a:t>au redevenit dependenți de heroină.</a:t>
+              <a:t>dintre cei dependenți în Vietnam mai erau dependenți.</a:t>
             </a:r>
             <a:endParaRPr lang="en-US" sz="1400" dirty="0"/>
           </a:p>
@@ -54683,7 +54687,7 @@
                 <a:ea typeface="Palatino Linotype" pitchFamily="34" charset="-122"/>
                 <a:cs typeface="Palatino Linotype" pitchFamily="34" charset="-120"/>
               </a:rPr>
-              <a:t>Hall și Weier: studiile lui Robins se citesc în original, nu în rezumatele altora.</a:t>
+              <a:t>Drogul nu devenise indisponibil acasă; tratamentul nu explică rata scăzută a redevenirii dependenței.</a:t>
             </a:r>
             <a:endParaRPr lang="en-US" sz="1400" dirty="0"/>
           </a:p>
@@ -54722,7 +54726,7 @@
                 <a:ea typeface="Palatino Linotype" pitchFamily="34" charset="-122"/>
                 <a:cs typeface="Palatino Linotype" pitchFamily="34" charset="-120"/>
               </a:rPr>
-              <a:t>Robins, Helzer și Davis, Arch Gen Psychiatry, 1975 · Hall și Weier, Addiction, 2017 · valori verificate în rezumate; textul integral Robins 1993 nu a fost accesibil</a:t>
+              <a:t>Robins, Helzer și Davis, Arch Gen Psychiatry, 1975 · Robins, 1993 · Heather, Addict Behav Rep, 2017</a:t>
             </a:r>
             <a:endParaRPr lang="en-US" sz="950" dirty="0"/>
           </a:p>
